--- a/slides/decks/L02-protocol.pptx
+++ b/slides/decks/L02-protocol.pptx
@@ -118,13 +118,13 @@
   <p:extLst>
     <p:ext uri="{521415D9-36F7-43E2-AB2F-B90AF26B5E84}">
       <p14:sectionLst xmlns:p14="http://schemas.microsoft.com/office/powerpoint/2010/main">
-        <p14:section name="开场" id="{04429964-8cda-c2e8-a273-127e7f1134c3}">
+        <p14:section name="开场" id="{8ed1fcbe-854a-6e10-831e-6278b7b815c3}">
           <p14:sldIdLst>
             <p14:sldId id="256"/>
             <p14:sldId id="257"/>
           </p14:sldIdLst>
         </p14:section>
-        <p14:section name="讲解" id="{5ff3c69b-8863-67d1-721d-ac40423f4120}">
+        <p14:section name="讲解" id="{992b62f6-b4b1-ca3d-be84-ee487337346a}">
           <p14:sldIdLst>
             <p14:sldId id="258"/>
             <p14:sldId id="259"/>
@@ -135,13 +135,13 @@
             <p14:sldId id="264"/>
           </p14:sldIdLst>
         </p14:section>
-        <p14:section name="练习" id="{0232c4fc-e666-1648-7f98-f575cfce9a31}">
+        <p14:section name="练习" id="{8d693580-3a62-a637-42e3-8b5cba1d8fba}">
           <p14:sldIdLst>
             <p14:sldId id="265"/>
             <p14:sldId id="266"/>
           </p14:sldIdLst>
         </p14:section>
-        <p14:section name="收束" id="{92a29d82-8319-3870-6faf-21b98229cc1b}">
+        <p14:section name="收束" id="{0b59df54-157e-e335-991e-8243ec644ad3}">
           <p14:sldIdLst>
             <p14:sldId id="267"/>
           </p14:sldIdLst>
